--- a/docs/presentation/uwf_idc6940_capstone_with_script.pptx
+++ b/docs/presentation/uwf_idc6940_capstone_with_script.pptx
@@ -4,6 +4,9 @@
   <p:sldMasterIdLst>
     <p:sldMasterId id="2147483648" r:id="rId1"/>
   </p:sldMasterIdLst>
+  <p:notesMasterIdLst>
+    <p:notesMasterId r:id="rId21"/>
+  </p:notesMasterIdLst>
   <p:sldIdLst>
     <p:sldId id="256" r:id="rId2"/>
     <p:sldId id="257" r:id="rId3"/>
@@ -25,10 +28,7 @@
     <p:sldId id="273" r:id="rId19"/>
     <p:sldId id="274" r:id="rId20"/>
   </p:sldIdLst>
-  <p:notesMasterIdLst>
-    <p:notesMasterId r:id="rId21"/>
-  </p:notesMasterIdLst>
-  <p:sldSz cx="9144000" cy="6858000"/>
+  <p:sldSz cx="9144000" cy="6858000" type="screen4x3"/>
   <p:notesSz cx="6858000" cy="9144000"/>
   <p:defaultTextStyle>
     <a:lvl1pPr marL="0" algn="l" defTabSz="914400" rtl="0" eaLnBrk="1" latinLnBrk="0" hangingPunct="1">
@@ -122,6 +122,11 @@
       </a:defRPr>
     </a:lvl9pPr>
   </p:defaultTextStyle>
+  <p:extLst>
+    <p:ext uri="{EFAFB233-063F-42B5-8137-9DF3F51BA10A}">
+      <p15:sldGuideLst xmlns:p15="http://schemas.microsoft.com/office/powerpoint/2012/main"/>
+    </p:ext>
+  </p:extLst>
 </p:presentation>
 </file>
 
@@ -147,234 +152,10 @@
           <a:chExt cx="0" cy="0"/>
         </a:xfrm>
       </p:grpSpPr>
-      <p:sp>
-        <p:nvSpPr>
-          <p:cNvPr id="2" name="Header Placeholder 1"/>
-          <p:cNvSpPr>
-            <a:spLocks noGrp="1"/>
-          </p:cNvSpPr>
-          <p:nvPr>
-            <p:ph type="hdr" sz="quarter"/>
-          </p:nvPr>
-        </p:nvSpPr>
-        <p:spPr>
-          <a:xfrm>
-            <a:off x="0" y="0"/>
-            <a:ext cx="2971800" cy="458788"/>
-          </a:xfrm>
-          <a:prstGeom prst="rect">
-            <a:avLst/>
-          </a:prstGeom>
-        </p:spPr>
-        <p:txBody>
-          <a:bodyPr vert="horz" lIns="91440" tIns="45720" rIns="91440" bIns="45720" rtlCol="0"/>
-          <a:lstStyle>
-            <a:lvl1pPr algn="l">
-              <a:defRPr sz="1200"/>
-            </a:lvl1pPr>
-          </a:lstStyle>
-          <a:p>
-            <a:endParaRPr lang="en-US"/>
-          </a:p>
-        </p:txBody>
-      </p:sp>
-      <p:sp>
-        <p:nvSpPr>
-          <p:cNvPr id="3" name="Date Placeholder 2"/>
-          <p:cNvSpPr>
-            <a:spLocks noGrp="1"/>
-          </p:cNvSpPr>
-          <p:nvPr>
-            <p:ph type="dt" idx="1"/>
-          </p:nvPr>
-        </p:nvSpPr>
-        <p:spPr>
-          <a:xfrm>
-            <a:off x="3884613" y="0"/>
-            <a:ext cx="2971800" cy="458788"/>
-          </a:xfrm>
-          <a:prstGeom prst="rect">
-            <a:avLst/>
-          </a:prstGeom>
-        </p:spPr>
-        <p:txBody>
-          <a:bodyPr vert="horz" lIns="91440" tIns="45720" rIns="91440" bIns="45720" rtlCol="0"/>
-          <a:lstStyle>
-            <a:lvl1pPr algn="r">
-              <a:defRPr sz="1200"/>
-            </a:lvl1pPr>
-          </a:lstStyle>
-          <a:p>
-            <a:fld id="{5282F153-3F37-0F45-9E97-73ACFA13230C}" type="datetimeFigureOut">
-              <a:rPr lang="en-US"/>
-              <a:t>7/23/19</a:t>
-            </a:fld>
-            <a:endParaRPr lang="en-US"/>
-          </a:p>
-        </p:txBody>
-      </p:sp>
-      <p:sp>
-        <p:nvSpPr>
-          <p:cNvPr id="4" name="Slide Image Placeholder 3"/>
-          <p:cNvSpPr>
-            <a:spLocks noGrp="1" noRot="1" noChangeAspect="1"/>
-          </p:cNvSpPr>
-          <p:nvPr>
-            <p:ph type="sldImg" idx="2"/>
-          </p:nvPr>
-        </p:nvSpPr>
-        <p:spPr>
-          <a:xfrm>
-            <a:off x="685800" y="1143000"/>
-            <a:ext cx="5486400" cy="3086100"/>
-          </a:xfrm>
-          <a:prstGeom prst="rect">
-            <a:avLst/>
-          </a:prstGeom>
-          <a:noFill/>
-          <a:ln w="12700">
-            <a:solidFill>
-              <a:prstClr val="black"/>
-            </a:solidFill>
-          </a:ln>
-        </p:spPr>
-        <p:txBody>
-          <a:bodyPr vert="horz" lIns="91440" tIns="45720" rIns="91440" bIns="45720" rtlCol="0" anchor="ctr"/>
-          <a:lstStyle/>
-          <a:p>
-            <a:endParaRPr lang="en-US"/>
-          </a:p>
-        </p:txBody>
-      </p:sp>
-      <p:sp>
-        <p:nvSpPr>
-          <p:cNvPr id="5" name="Notes Placeholder 4"/>
-          <p:cNvSpPr>
-            <a:spLocks noGrp="1"/>
-          </p:cNvSpPr>
-          <p:nvPr>
-            <p:ph type="body" sz="quarter" idx="3"/>
-          </p:nvPr>
-        </p:nvSpPr>
-        <p:spPr>
-          <a:xfrm>
-            <a:off x="685800" y="4400550"/>
-            <a:ext cx="5486400" cy="3600450"/>
-          </a:xfrm>
-          <a:prstGeom prst="rect">
-            <a:avLst/>
-          </a:prstGeom>
-        </p:spPr>
-        <p:txBody>
-          <a:bodyPr vert="horz" lIns="91440" tIns="45720" rIns="91440" bIns="45720" rtlCol="0"/>
-          <a:lstStyle/>
-          <a:p>
-            <a:pPr lvl="0"/>
-            <a:r>
-              <a:rPr lang="en-US"/>
-              <a:t>Click to edit Master text styles</a:t>
-            </a:r>
-          </a:p>
-          <a:p>
-            <a:pPr lvl="1"/>
-            <a:r>
-              <a:rPr lang="en-US"/>
-              <a:t>Second level</a:t>
-            </a:r>
-          </a:p>
-          <a:p>
-            <a:pPr lvl="2"/>
-            <a:r>
-              <a:rPr lang="en-US"/>
-              <a:t>Third level</a:t>
-            </a:r>
-          </a:p>
-          <a:p>
-            <a:pPr lvl="3"/>
-            <a:r>
-              <a:rPr lang="en-US"/>
-              <a:t>Fourth level</a:t>
-            </a:r>
-          </a:p>
-          <a:p>
-            <a:pPr lvl="4"/>
-            <a:r>
-              <a:rPr lang="en-US"/>
-              <a:t>Fifth level</a:t>
-            </a:r>
-          </a:p>
-        </p:txBody>
-      </p:sp>
-      <p:sp>
-        <p:nvSpPr>
-          <p:cNvPr id="6" name="Footer Placeholder 5"/>
-          <p:cNvSpPr>
-            <a:spLocks noGrp="1"/>
-          </p:cNvSpPr>
-          <p:nvPr>
-            <p:ph type="ftr" sz="quarter" idx="4"/>
-          </p:nvPr>
-        </p:nvSpPr>
-        <p:spPr>
-          <a:xfrm>
-            <a:off x="0" y="8685213"/>
-            <a:ext cx="2971800" cy="458787"/>
-          </a:xfrm>
-          <a:prstGeom prst="rect">
-            <a:avLst/>
-          </a:prstGeom>
-        </p:spPr>
-        <p:txBody>
-          <a:bodyPr vert="horz" lIns="91440" tIns="45720" rIns="91440" bIns="45720" rtlCol="0" anchor="b"/>
-          <a:lstStyle>
-            <a:lvl1pPr algn="l">
-              <a:defRPr sz="1200"/>
-            </a:lvl1pPr>
-          </a:lstStyle>
-          <a:p>
-            <a:endParaRPr lang="en-US"/>
-          </a:p>
-        </p:txBody>
-      </p:sp>
-      <p:sp>
-        <p:nvSpPr>
-          <p:cNvPr id="7" name="Slide Number Placeholder 6"/>
-          <p:cNvSpPr>
-            <a:spLocks noGrp="1"/>
-          </p:cNvSpPr>
-          <p:nvPr>
-            <p:ph type="sldNum" sz="quarter" idx="5"/>
-          </p:nvPr>
-        </p:nvSpPr>
-        <p:spPr>
-          <a:xfrm>
-            <a:off x="3884613" y="8685213"/>
-            <a:ext cx="2971800" cy="458787"/>
-          </a:xfrm>
-          <a:prstGeom prst="rect">
-            <a:avLst/>
-          </a:prstGeom>
-        </p:spPr>
-        <p:txBody>
-          <a:bodyPr vert="horz" lIns="91440" tIns="45720" rIns="91440" bIns="45720" rtlCol="0" anchor="b"/>
-          <a:lstStyle>
-            <a:lvl1pPr algn="r">
-              <a:defRPr sz="1200"/>
-            </a:lvl1pPr>
-          </a:lstStyle>
-          <a:p>
-            <a:fld id="{CE5E9CC1-C706-0F49-92D6-E571CC5EEA8F}" type="slidenum">
-              <a:rPr lang="en-US"/>
-              <a:t>‹#›</a:t>
-            </a:fld>
-            <a:endParaRPr lang="en-US"/>
-          </a:p>
-        </p:txBody>
-      </p:sp>
     </p:spTree>
     <p:extLst>
       <p:ext uri="{BB962C8B-B14F-4D97-AF65-F5344CB8AC3E}">
-        <p14:creationId xmlns:p14="http://schemas.microsoft.com/office/powerpoint/2010/main" val="1024086991"/>
+        <p14:creationId xmlns:p14="http://schemas.microsoft.com/office/powerpoint/2010/main" val="387408581"/>
       </p:ext>
     </p:extLst>
   </p:cSld>
@@ -521,13 +302,20 @@
             <a:r>
               <a:rPr lang="en-US" dirty="0"/>
               <a:t>SLIDE 1 SCRIPT (~30 seconds):
-"Good [morning/afternoon/evening] everyone. Thank you for joining today. My name is Farooq Mahmud,
-and this is my capstone presentation for IDC 6940. The project is titled 'Comparing ARIMA and LSTM
+"Good [morning/afternoon/evening] everyone. My name is Farooq Mahmud,
+and my capstone is </a:t>
+            </a:r>
+            <a:r>
+              <a:rPr lang="en-US" dirty="0" err="1"/>
+              <a:t>longly</a:t>
+            </a:r>
+            <a:r>
+              <a:rPr lang="en-US" dirty="0"/>
+              <a:t> titled 'Comparing ARIMA and LSTM
 for Short-Term Forecasting of Daily Average Uber Trip Duration in New York City.' Over the next 20
 minutes I'll walk you through the motivation, the methods, the implementation, the results, and
-what I learned from this project. Let's get started."</a:t>
+what I learned from this project. Let's get into it."</a:t>
             </a:r>
-            <a:endParaRPr lang="en-US" dirty="0"/>
           </a:p>
         </p:txBody>
       </p:sp>
@@ -620,7 +408,15 @@
 This strict chronological split is essential. You must never train on future data
 when evaluating a time series model, because that would leak future information and
 produce artificially optimistic results.
-Both models are evaluated on the exact same 14 test days using two metrics. sMAPE-
+Both models are evaluated on the exact same 14 test days using two metrics. </a:t>
+            </a:r>
+            <a:r>
+              <a:rPr lang="en-US" dirty="0" err="1"/>
+              <a:t>sMAPE</a:t>
+            </a:r>
+            <a:r>
+              <a:rPr lang="en-US" dirty="0"/>
+              <a:t>-
 symmetric mean absolute percentage error-is scale-independent and symmetric, treating
 over- and under-forecasting equally. MASE-mean absolute scaled error-benchmarks
 the forecast against a naive forecast on the training data. A naive foreacast meaning the last known value is used.
@@ -628,7 +424,6 @@
 returned as a proportion by the R Metrics package, I multiply by 100 to express it
 as a percentage."</a:t>
             </a:r>
-            <a:endParaRPr lang="en-US" dirty="0"/>
           </a:p>
         </p:txBody>
       </p:sp>
@@ -716,26 +511,35 @@
               <a:rPr lang="en-US" dirty="0"/>
               <a:t>SLIDE 11 SCRIPT (~2 minutes):
 "Now let me talk about the code and implementation, because this is where a lot of the
-real work happened.
-The code is entirely original. I did not copy from any specific GitHub repository.
+real work happened. All the code is in my public </a:t>
+            </a:r>
+            <a:r>
+              <a:rPr lang="en-US" dirty="0" err="1"/>
+              <a:t>github</a:t>
+            </a:r>
+            <a:r>
+              <a:rPr lang="en-US" dirty="0"/>
+              <a:t> repo. The link is on the next to the last slide.
+Coding was difficult mainly because of my lack of familiarity with </a:t>
+            </a:r>
+            <a:r>
+              <a:rPr lang="en-US" dirty="0" err="1"/>
+              <a:t>Keras</a:t>
+            </a:r>
+            <a:r>
+              <a:rPr lang="en-US" dirty="0"/>
+              <a:t> and R when it comes to LSTM’s. 
 The PySpark preprocessing pipeline-all the filtering, cleaning, and aggregation-I
 wrote from scratch for this project, guided by the PySpark documentation and the
 structure of the NYC TLC data dictionary.
 The R LSTM pipeline follows well-known patterns documented in the Keras time series
 tutorial and the rwanjohi LSTM-in-R repository. However, the specific combination
-of the functional Keras API, custom create_sequences function, min-max scaling
-recursive forecasting loop, and MASE/sMAPE evaluation is original code
+of the functional Keras API, recursive forecasting loop, and MASE/sMAPE evaluation is original code
 I wrote for this project.
-I actually spent a good part of the project searching public GitHub repos to check
-whether similar code existed. The conclusion was that no single public repository
-contains code substantially identical to the capstone's appendix. The closest
-conceptual matches are the Keras official time series tutorial-which the paper
-already cites-and rwanjohi's LSTM R repo, which uses a different API style and
-differencing-based preprocessing rather than sliding windows.
-The biggest implementation challenge was LSTM reproducibility, which I'll talk
+Finally, I work with a few data scientists and their consultation was immensely helpful.
+Aside from the code, the biggest implementation challenge was LSTM reproducibility, which I'll talk
 about on the next slide."</a:t>
             </a:r>
-            <a:endParaRPr lang="en-US" dirty="0"/>
           </a:p>
         </p:txBody>
       </p:sp>
@@ -822,14 +626,22 @@
             <a:r>
               <a:rPr lang="en-US" dirty="0"/>
               <a:t>SLIDE 12 SCRIPT (~2 minutes):
-"The single biggest challenge in the implementation was LSTM reproducibility. Unlike
-ARIMA, which is a deterministic algorithm given the same data, LSTM training is
+"Unlike ARIMA, which is a deterministic algorithm given the same data, LSTM training is
 stochastic. The randomness comes from three sources: weight initialization, the
 random validation split during training, and dropout during each forward pass.
 I attempted to fix the random seed using TensorFlow's set_random_seed and R's
-set.seed, but in our environment-R with Keras on Windows-seed fixing did not produce
-consistent results across runs. The sMAPE and MASE values shifted noticeably from
-run to run.
+set.seed, but in my environment-R with Keras on Windows-seed fixing did not produce
+consistent results across runs. Maybe I should have tried 42 for the seed. </a:t>
+            </a:r>
+          </a:p>
+          <a:p>
+            <a:endParaRPr lang="en-US" dirty="0"/>
+          </a:p>
+          <a:p>
+            <a:r>
+              <a:rPr lang="en-US" dirty="0"/>
+              <a:t>Anyway, as a result of this randomness, the sMAPE and MASE values shifted noticeably from
+run to run for LSTM.
 The solution I adopted was to run the LSTM pipeline five independent times and report
 the mean and standard deviation of the metrics across those five runs. This gives a
 statistically honest summary: you can see both the central tendency and the variability
@@ -845,7 +657,6 @@
 approxQuantile function, which is approximate by design but fast enough at this scale,
 and accurate enough for outlier detection."</a:t>
             </a:r>
-            <a:endParaRPr lang="en-US" dirty="0"/>
           </a:p>
         </p:txBody>
       </p:sp>
@@ -933,12 +744,20 @@
               <a:rPr lang="en-US" dirty="0"/>
               <a:t>SLIDE 13 SCRIPT (~1.5 minutes):
 "Let's look at the results. This plot shows the ARIMA 14-day point forecast together
-with the 80% and 95% prediction intervals, compared against the actual values.
+with the 80% and 95% prediction intervals, compared against the actual values.</a:t>
+            </a:r>
+          </a:p>
+          <a:p>
+            <a:endParaRPr lang="en-US" dirty="0"/>
+          </a:p>
+          <a:p>
+            <a:r>
+              <a:rPr lang="en-US" dirty="0"/>
+              <a:t>Notice that the ARIMA forecast is flat. This is expected behavior because the ARIMA model converges toward the recent average – that’s the MA in ARIMA.
 Most of the actual values fall within the 95% prediction interval, which is good. A couple of points-particularly
 around Christmas-fall at the edge of or outside the 80% interval, reflecting the
 holiday-driven deviation that neither model anticipated."</a:t>
             </a:r>
-            <a:endParaRPr lang="en-US" dirty="0"/>
           </a:p>
         </p:txBody>
       </p:sp>
@@ -1025,20 +844,24 @@
             <a:r>
               <a:rPr lang="en-US" dirty="0"/>
               <a:t>SLIDE 14 SCRIPT (~2 minutes):
-"Now let's add LSTM to the picture. Overlaying the two forecasts, LSTM is slightly
-smoother than ARIMA with a gentle downward trend, reflecting that the network is
+"Now let's add LSTM to the picture. Overlaying the two forecasts, LSTM
+has a gentle downward trend, reflecting that the network is
 averaging toward the historical mean and picking up a slight downward signal in the
 recent data. But like ARIMA, it missed the Christmas dip entirely.
-The metric table tells the story. ARIMA achieved an sMAPE of 7.58% and a MASE of
+The metric table tells the bottom line. ARIMA achieved an sMAPE of 7.58% and a MASE of
 1.93. The LSTM averaged an sMAPE of 8.05% plus or minus 0.34 percentage points, and
-a MASE of 2.09 plus or minus 0.09, across five independent runs.
-On both metrics, ARIMA edged out LSTM. The gap is modest-less than half a percentage
-point on sMAPE-but it's consistent. Worth noting: both models have MASE above 1,
+a MASE of 2.09 plus or minus 0.09, across five independent runs.</a:t>
+            </a:r>
+          </a:p>
+          <a:p>
+            <a:r>
+              <a:rPr lang="en-US" dirty="0"/>
+              <a:t>
+On both metrics, ARIMA edged out LSTM. The gap is significant. It’s worth noting that both models have MASE above 1,
 which means neither beats a naive forecast on this test window. That's
-an honest result-the 14-day holiday period is simply hard to forecast with a
+an honest result because the 14-day holiday period is simply hard to forecast with a
 univariate model."</a:t>
             </a:r>
-            <a:endParaRPr lang="en-US" dirty="0"/>
           </a:p>
         </p:txBody>
       </p:sp>
@@ -1132,7 +955,6 @@
 curves stabilize well within the 100-epochs, confirming that early stopping
 fired appropriately and that additional epochs would not have improved the forecast."</a:t>
             </a:r>
-            <a:endParaRPr lang="en-US" dirty="0"/>
           </a:p>
         </p:txBody>
       </p:sp>
@@ -1220,7 +1042,7 @@
               <a:rPr lang="en-US" dirty="0"/>
               <a:t>SLIDE 16 SCRIPT (~1.5 minutes):
 "So what do these results mean? A few key interpretations.
-First, for a short-horizon univariate forecasting problem with only 366 training
+First, for a short-horizon univariate forecasting problem with only around 280 training
 observations, ARIMA is a strong baseline. It is deterministic, interpretable, and
 runs in seconds. The LSTM, by contrast, requires careful hyperparameter tuning,
 careful handling of scaling, early stopping, and multiple runs to get a stable metric
@@ -1228,14 +1050,12 @@
 Second, both models struggled with holiday effects. December 25 saw a sharp drop
 in average trip duration, likely because fewer riders take longer trips on Christmas
 Day. A univariate model with no calendar features simply cannot anticipate this.
-Third, the LSTM's run-to-run variability-roughly ±0.34 sMAPE points-is not negligible.
-When two models are separated by less than half a percentage point, that variability
-matters. Reporting a single LSTM run would be misleading.
+Third, the LSTM's run-to-run variability-roughly ±0.34 sMAPE points-is not insignificant.
+That variability matters and reporting a single LSTM run would be misleading.
 The broader takeaway is that the assumption 'deep learning is always better' does
 not hold in small-data, short-horizon settings. ARIMA's simplicity is a strength
 when data are limited."</a:t>
             </a:r>
-            <a:endParaRPr lang="en-US" dirty="0"/>
           </a:p>
         </p:txBody>
       </p:sp>
@@ -1323,18 +1143,17 @@
               <a:rPr lang="en-US" dirty="0"/>
               <a:t>SLIDE 17 SCRIPT (~1 minute):
 "Let me summarize the conclusions. The capstone set out to answer a concrete question:
-ARIMA or LSTM for 14-day forecasting of daily Uber trip duration? The answer is that
-ARIMA performed slightly better on sMAPE and MASE in this controlled experiment.
-The work contributes a fully reproducible pipeline-from a 200-million-row PySpark ETL
+Shous you choose ARIMA or LSTM for 14-day forecasting of daily Uber trip duration? The answer is that
+ARIMA performed slightly better on sMAPE and MASE metrics in this controlled experiment.
+The capstone contributes a fully reproducible pipeline-from a 200-million-row PySpark ETL
 all the way through to metric evaluation-that others can replicate and extend. The honest
 reporting of LSTM variability across five runs adds statistical rigor that a single
 reported run would lack.
 The result is not a blanket endorsement of ARIMA over neural networks. It's a concrete,
 data-driven demonstration that in the right conditions-small sample, univariate,
-short horizon-classical methods remain competitive. Choosing the right tool requires
+and short horizon-classical methods remain competitive. Choosing the right tool requires
 understanding both the data and the limitations of each method."</a:t>
             </a:r>
-            <a:endParaRPr lang="en-US" dirty="0"/>
           </a:p>
         </p:txBody>
       </p:sp>
@@ -1433,7 +1252,6 @@
 could resolve the seed-fixing issue and eliminate the need for averaging across
 multiple runs to get stable metrics."</a:t>
             </a:r>
-            <a:endParaRPr lang="en-US" dirty="0"/>
           </a:p>
         </p:txBody>
       </p:sp>
@@ -1520,11 +1338,18 @@
             <a:r>
               <a:rPr lang="en-US" dirty="0"/>
               <a:t>SLIDE 19 SCRIPT (~30 seconds):
-"Thank you for your time. The code, data, and outputs for this project are all
-publicly available via the GitHub release linked in the paper. I'm happy to answer
-any questions."</a:t>
+"The code, data, and outputs for this project are all
+publicly available via the GitHub release shown here. </a:t>
             </a:r>
+          </a:p>
+          <a:p>
             <a:endParaRPr lang="en-US" dirty="0"/>
+          </a:p>
+          <a:p>
+            <a:r>
+              <a:rPr lang="en-US" dirty="0"/>
+              <a:t>Thank you for your time. </a:t>
+            </a:r>
           </a:p>
         </p:txBody>
       </p:sp>
@@ -1616,7 +1441,6 @@
 close with the conclusions and future directions. I'll try to be as concrete as possible
 so you can see exactly what was done at each stage."</a:t>
             </a:r>
-            <a:endParaRPr lang="en-US" dirty="0"/>
           </a:p>
         </p:txBody>
       </p:sp>
@@ -1705,16 +1529,24 @@
               <a:t>SLIDE 3 SCRIPT (~1 minute):
 "The central question driving this capstone is straightforward: for a short-horizon, univariate
 time series, does a classical statistical model-ARIMA-outperform a neural sequence model-LSTM?
-This question matters in practice. If you're an operations manager at Uber trying to schedule
-drivers two weeks out, you need a reliable forecast. You also need to know whether it's worth
+This question matters in practice. If you work for Uber and are trying to predict
+driver utilization two weeks out, you need a reliable forecast. You also need to know whether it's worth
 the additional complexity of a deep learning model, or whether a simpler classical approach
-gives you equally good-or even better-results.
+gives you equally good-or even better-results.</a:t>
+            </a:r>
+          </a:p>
+          <a:p>
+            <a:endParaRPr lang="en-US" dirty="0"/>
+          </a:p>
+          <a:p>
+            <a:r>
+              <a:rPr lang="en-US" dirty="0"/>
+              <a:t>I also took a time-series and machine learning courses here at UWF and I thought it would be fun to leverage both in a single project. So here I am. 
 The specific target variable is the daily average Uber trip duration in minutes in New York City.
-We have 366 daily observations for the full year 2024, and we produce a 14-day ahead forecast
+We have 366 daily observations for the full year 2024 – 366 observations because 2024 was a leap year - and we produce a 14-day forecast
 with both methods, evaluated on the same test window using two well-established metrics:
 sMAPE and MASE."</a:t>
             </a:r>
-            <a:endParaRPr lang="en-US" dirty="0"/>
           </a:p>
         </p:txBody>
       </p:sp>
@@ -1801,21 +1633,36 @@
             <a:r>
               <a:rPr lang="en-US" dirty="0"/>
               <a:t>SLIDE 4 SCRIPT (~1.5 minutes):
-"Let me give a bit more background. Time-series forecasting sits at the heart of statistics and
-data science. ARIMA-AutoRegressive Integrated Moving Average-has been the workhorse of
+"Let me give a bit more background, especially for those who haven’t taken a time-series course. </a:t>
+            </a:r>
+          </a:p>
+          <a:p>
+            <a:endParaRPr lang="en-US" dirty="0"/>
+          </a:p>
+          <a:p>
+            <a:r>
+              <a:rPr lang="en-US" dirty="0"/>
+              <a:t>ARIMA which stands for </a:t>
+            </a:r>
+            <a:r>
+              <a:rPr lang="en-US" dirty="0" err="1"/>
+              <a:t>AutoRegressive</a:t>
+            </a:r>
+            <a:r>
+              <a:rPr lang="en-US" dirty="0"/>
+              <a:t> Integrated Moving Average-has been the workhorse of
 univariate forecasting for decades. It's interpretable, well-understood, and performs
 surprisingly well on datasets where the underlying dynamics are relatively simple.
-LSTM networks, which are a type of recurrent neural network designed by Hochreiter and
-Schmidhuber in 1997, were built specifically to capture long-range temporal dependencies
+LSTM networks which stands for Long Short-Term Memory, are a type of recurrent neural network designed by Hochreiter and
+Schmidhuber in 1997, built specifically to capture long-range temporal dependencies
 that vanilla RNNs struggle with because of the vanishing gradient problem. They have become
 extremely popular for time-series tasks ranging from financial forecasting to natural language
 processing.
 The open question this project addresses is whether LSTM's added modeling power is actually
-beneficial when you have a relatively small dataset-366 observations-and a univariate setting.
+beneficial when you have a relatively small dataset-366 observations-and a univariate setting – the daily average trip duration.
 Comparative studies in the literature, like the one cited by Prabhat et al. 2024, show mixed
 results and motivate exactly this kind of direct, reproducible comparison."</a:t>
             </a:r>
-            <a:endParaRPr lang="en-US" dirty="0"/>
           </a:p>
         </p:txBody>
       </p:sp>
@@ -1907,7 +1754,7 @@
 for 2024 contains over 200 million trip records. Of those, about 179 million belong to Uber,
 identified by the license code HV0003.
 The preprocessing was done in PySpark running on Google Colab, because the raw files are
-simply too large to process on a laptop. After filtering to Uber trips, I derived two new
+simply too large for me to process locally. After filtering to Uber trips, I derived two new
 columns-trip duration in minutes and average speed in miles per hour. I then applied a
 two-step outlier removal: first basic range filters to remove physically impossible trips
 such as a zero-minute duration or a 200-mile ride, and then an IQR-based filter to remove
@@ -1915,7 +1762,6 @@
 aggregated to a single CSV file with 366 rows-one row per day-containing the date and the
 mean trip duration for that day."</a:t>
             </a:r>
-            <a:endParaRPr lang="en-US" dirty="0"/>
           </a:p>
         </p:txBody>
       </p:sp>
@@ -2003,13 +1849,22 @@
               <a:rPr lang="en-US" dirty="0"/>
               <a:t>SLIDE 6 SCRIPT (~1 minute):
 "Here's what the final time series looks like. You can see 366 points running from January
-through December 2024. There's a clear seasonal pattern-trip durations tend to be longer on
-weekdays than on weekends, and there are dips around major holidays. The December 25 dip is
-particularly visible. The series is relatively smooth and stationary-looking, which is
-actually a favorable property for ARIMA. For LSTM, the weekly oscillation gives the model
+through December 2024. The series looks stationary at first glance, at least to me. Stationarity is necessary property for ARIMA.   </a:t>
+            </a:r>
+          </a:p>
+          <a:p>
+            <a:r>
+              <a:rPr lang="en-US" dirty="0"/>
+              <a:t>However, your intuition might tell you that trip durations should exhibit a pattern – trips are longer on the weekdays than on weekends. This is truly the case. This is called</a:t>
+            </a:r>
+          </a:p>
+          <a:p>
+            <a:r>
+              <a:rPr lang="en-US" dirty="0"/>
+              <a:t>A seasonal pattern. What’s more, there are obvious dips on major holidays. The December 25 dip is
+particularly visible. This seasonal component is reflected in the chosen ARIMA model. For LSTM, the weekly oscillation gives the model
 a repeating pattern to learn."</a:t>
             </a:r>
-            <a:endParaRPr lang="en-US" dirty="0"/>
           </a:p>
         </p:txBody>
       </p:sp>
@@ -2096,7 +1951,7 @@
             <a:r>
               <a:rPr lang="en-US" dirty="0"/>
               <a:t>SLIDE 7 SCRIPT (~2 minutes):
-"Now let me walk through the mathematics. ARIMA stands for AutoRegressive Integrated Moving
+"Now let me try to walk through the math. ARIMA stands for AutoRegressive Integrated Moving
 Average. The general form is ARIMA(p, d, q). After d rounds of differencing to achieve
 stationarity, the model expresses the current value as a linear combination of the p most
 recent past values-that's the autoregressive part-plus a linear combination of the q most
@@ -2108,9 +1963,8 @@
 remove the trend and achieve stationarity, an autoregressive term that depends on the most
 recent observation, and four moving-average terms that incorporate forecast errors from the
 last four time steps. Intuitively, the MA(4) terms help the model recover quickly from
-short-term anomalies like an unusual traffic event."</a:t>
+“shocks” in the system, like an unusual traffic event."</a:t>
             </a:r>
-            <a:endParaRPr lang="en-US" dirty="0"/>
           </a:p>
         </p:txBody>
       </p:sp>
@@ -2203,19 +2057,24 @@
 The time steps dimension is the sequence length, which I set to 21 days. I chose 21
 because the series shows weekly cycles-weekdays and weekends behave differently. With
 three weeks of context, the LSTM sees three full repetitions of the weekly pattern,
-giving it enough information to recognize and extrapolate the cycle.
+giving it enough information, in my view, to recognize and extrapolate the cycle.
 The model has a single LSTM layer with 32 hidden neurons. After the LSTM layer there's a
 dropout layer with a rate of 0.2, which randomly zeros out 20% of the neurons during
 each training step to reduce overfitting. Finally, a dense output layer with a single
 neuron produces the predicted value for the next day.
 The model is trained to minimize mean squared error using the Adam optimizer.
 Early stopping monitors the validation loss with a patience of 15 epochs and restores
-the best weights found during training.
+the best weights found during training. Patience meaning how long the training will wait</a:t>
+            </a:r>
+          </a:p>
+          <a:p>
+            <a:r>
+              <a:rPr lang="en-US" dirty="0"/>
+              <a:t>Before giving up on improvement. This is important because training too long can result in overfitting. 
 Forecasting is done recursively: I feed the last 21-day window before the test period
 to the model, predict day 1, append that prediction to the window, drop the oldest
 value, and repeat 14 times to get the full 14-day forecast."</a:t>
             </a:r>
-            <a:endParaRPr lang="en-US" dirty="0"/>
           </a:p>
         </p:txBody>
       </p:sp>
@@ -2303,9 +2162,14 @@
               <a:rPr lang="en-US" dirty="0"/>
               <a:t>SLIDE 9 SCRIPT (~30 seconds):
 "Here's a visual of the LSTM architecture showing how data flows from the input sequence
-through the LSTM layer, dropout, and into the single output neuron."</a:t>
+through the LSTM layer, dropout, and into the single output neuron.“ Apologies for the scaling. It  looks better</a:t>
             </a:r>
-            <a:endParaRPr lang="en-US" dirty="0"/>
+          </a:p>
+          <a:p>
+            <a:r>
+              <a:rPr lang="en-US" dirty="0"/>
+              <a:t>In the paper.</a:t>
+            </a:r>
           </a:p>
         </p:txBody>
       </p:sp>
@@ -2378,6 +2242,11 @@
 <file path=ppt/slideMasters/slideMaster1.xml><?xml version="1.0" encoding="utf-8"?>
 <p:sldMaster xmlns:a="http://schemas.openxmlformats.org/drawingml/2006/main" xmlns:r="http://schemas.openxmlformats.org/officeDocument/2006/relationships" xmlns:p="http://schemas.openxmlformats.org/presentationml/2006/main">
   <p:cSld>
+    <p:bg>
+      <p:bgRef idx="1001">
+        <a:schemeClr val="bg1"/>
+      </p:bgRef>
+    </p:bg>
     <p:spTree>
       <p:nvGrpSpPr>
         <p:cNvPr id="1" name=""/>
@@ -2658,7 +2527,7 @@
     <p:bg>
       <p:bgPr>
         <a:blipFill dpi="0" rotWithShape="1">
-          <a:blip r:embed="rId1">
+          <a:blip r:embed="rId3">
             <a:lum/>
           </a:blip>
           <a:srcRect/>
@@ -2697,7 +2566,7 @@
     <p:bg>
       <p:bgPr>
         <a:blipFill dpi="0" rotWithShape="1">
-          <a:blip r:embed="rId1">
+          <a:blip r:embed="rId3">
             <a:lum/>
           </a:blip>
           <a:srcRect/>
@@ -2736,7 +2605,7 @@
     <p:bg>
       <p:bgPr>
         <a:blipFill dpi="0" rotWithShape="1">
-          <a:blip r:embed="rId1">
+          <a:blip r:embed="rId3">
             <a:lum/>
           </a:blip>
           <a:srcRect/>
@@ -2775,7 +2644,7 @@
     <p:bg>
       <p:bgPr>
         <a:blipFill dpi="0" rotWithShape="1">
-          <a:blip r:embed="rId1">
+          <a:blip r:embed="rId3">
             <a:lum/>
           </a:blip>
           <a:srcRect/>
@@ -2814,7 +2683,7 @@
     <p:bg>
       <p:bgPr>
         <a:blipFill dpi="0" rotWithShape="1">
-          <a:blip r:embed="rId1">
+          <a:blip r:embed="rId3">
             <a:lum/>
           </a:blip>
           <a:srcRect/>
@@ -2853,7 +2722,7 @@
     <p:bg>
       <p:bgPr>
         <a:blipFill dpi="0" rotWithShape="1">
-          <a:blip r:embed="rId1">
+          <a:blip r:embed="rId3">
             <a:lum/>
           </a:blip>
           <a:srcRect/>
@@ -2892,7 +2761,7 @@
     <p:bg>
       <p:bgPr>
         <a:blipFill dpi="0" rotWithShape="1">
-          <a:blip r:embed="rId1">
+          <a:blip r:embed="rId3">
             <a:lum/>
           </a:blip>
           <a:srcRect/>
@@ -2931,7 +2800,7 @@
     <p:bg>
       <p:bgPr>
         <a:blipFill dpi="0" rotWithShape="1">
-          <a:blip r:embed="rId1">
+          <a:blip r:embed="rId3">
             <a:lum/>
           </a:blip>
           <a:srcRect/>
@@ -2970,7 +2839,7 @@
     <p:bg>
       <p:bgPr>
         <a:blipFill dpi="0" rotWithShape="1">
-          <a:blip r:embed="rId1">
+          <a:blip r:embed="rId3">
             <a:lum/>
           </a:blip>
           <a:srcRect/>
@@ -3009,7 +2878,7 @@
     <p:bg>
       <p:bgPr>
         <a:blipFill dpi="0" rotWithShape="1">
-          <a:blip r:embed="rId1">
+          <a:blip r:embed="rId3">
             <a:lum/>
           </a:blip>
           <a:srcRect/>
@@ -3048,7 +2917,7 @@
     <p:bg>
       <p:bgPr>
         <a:blipFill dpi="0" rotWithShape="1">
-          <a:blip r:embed="rId1">
+          <a:blip r:embed="rId3">
             <a:lum/>
           </a:blip>
           <a:srcRect/>
@@ -3087,7 +2956,7 @@
     <p:bg>
       <p:bgPr>
         <a:blipFill dpi="0" rotWithShape="1">
-          <a:blip r:embed="rId1">
+          <a:blip r:embed="rId3">
             <a:lum/>
           </a:blip>
           <a:srcRect/>
@@ -3126,7 +2995,7 @@
     <p:bg>
       <p:bgPr>
         <a:blipFill dpi="0" rotWithShape="1">
-          <a:blip r:embed="rId1">
+          <a:blip r:embed="rId3">
             <a:lum/>
           </a:blip>
           <a:srcRect/>
@@ -3165,7 +3034,7 @@
     <p:bg>
       <p:bgPr>
         <a:blipFill dpi="0" rotWithShape="1">
-          <a:blip r:embed="rId1">
+          <a:blip r:embed="rId3">
             <a:lum/>
           </a:blip>
           <a:srcRect/>
@@ -3204,7 +3073,7 @@
     <p:bg>
       <p:bgPr>
         <a:blipFill dpi="0" rotWithShape="1">
-          <a:blip r:embed="rId1">
+          <a:blip r:embed="rId3">
             <a:lum/>
           </a:blip>
           <a:srcRect/>
@@ -3243,7 +3112,7 @@
     <p:bg>
       <p:bgPr>
         <a:blipFill dpi="0" rotWithShape="1">
-          <a:blip r:embed="rId1">
+          <a:blip r:embed="rId3">
             <a:lum/>
           </a:blip>
           <a:srcRect/>
@@ -3282,7 +3151,7 @@
     <p:bg>
       <p:bgPr>
         <a:blipFill dpi="0" rotWithShape="1">
-          <a:blip r:embed="rId1">
+          <a:blip r:embed="rId3">
             <a:lum/>
           </a:blip>
           <a:srcRect/>
@@ -3321,7 +3190,7 @@
     <p:bg>
       <p:bgPr>
         <a:blipFill dpi="0" rotWithShape="1">
-          <a:blip r:embed="rId1">
+          <a:blip r:embed="rId3">
             <a:lum/>
           </a:blip>
           <a:srcRect/>
@@ -3360,7 +3229,7 @@
     <p:bg>
       <p:bgPr>
         <a:blipFill dpi="0" rotWithShape="1">
-          <a:blip r:embed="rId1">
+          <a:blip r:embed="rId3">
             <a:lum/>
           </a:blip>
           <a:srcRect/>
@@ -3686,4 +3555,299 @@
     </a:ext>
   </a:extLst>
 </a:theme>
+</file>
+
+<file path=ppt/theme/theme2.xml><?xml version="1.0" encoding="utf-8"?>
+<a:theme xmlns:a="http://schemas.openxmlformats.org/drawingml/2006/main" name="Office Theme">
+  <a:themeElements>
+    <a:clrScheme name="Office">
+      <a:dk1>
+        <a:sysClr val="windowText" lastClr="000000"/>
+      </a:dk1>
+      <a:lt1>
+        <a:sysClr val="window" lastClr="FFFFFF"/>
+      </a:lt1>
+      <a:dk2>
+        <a:srgbClr val="44546A"/>
+      </a:dk2>
+      <a:lt2>
+        <a:srgbClr val="E7E6E6"/>
+      </a:lt2>
+      <a:accent1>
+        <a:srgbClr val="4472C4"/>
+      </a:accent1>
+      <a:accent2>
+        <a:srgbClr val="ED7D31"/>
+      </a:accent2>
+      <a:accent3>
+        <a:srgbClr val="A5A5A5"/>
+      </a:accent3>
+      <a:accent4>
+        <a:srgbClr val="FFC000"/>
+      </a:accent4>
+      <a:accent5>
+        <a:srgbClr val="5B9BD5"/>
+      </a:accent5>
+      <a:accent6>
+        <a:srgbClr val="70AD47"/>
+      </a:accent6>
+      <a:hlink>
+        <a:srgbClr val="0563C1"/>
+      </a:hlink>
+      <a:folHlink>
+        <a:srgbClr val="954F72"/>
+      </a:folHlink>
+    </a:clrScheme>
+    <a:fontScheme name="Office">
+      <a:majorFont>
+        <a:latin typeface="Calibri Light" panose="020F0302020204030204"/>
+        <a:ea typeface=""/>
+        <a:cs typeface=""/>
+        <a:font script="Jpan" typeface="游ゴシック Light"/>
+        <a:font script="Hang" typeface="맑은 고딕"/>
+        <a:font script="Hans" typeface="等线 Light"/>
+        <a:font script="Hant" typeface="新細明體"/>
+        <a:font script="Arab" typeface="Times New Roman"/>
+        <a:font script="Hebr" typeface="Times New Roman"/>
+        <a:font script="Thai" typeface="Angsana New"/>
+        <a:font script="Ethi" typeface="Nyala"/>
+        <a:font script="Beng" typeface="Vrinda"/>
+        <a:font script="Gujr" typeface="Shruti"/>
+        <a:font script="Khmr" typeface="MoolBoran"/>
+        <a:font script="Knda" typeface="Tunga"/>
+        <a:font script="Guru" typeface="Raavi"/>
+        <a:font script="Cans" typeface="Euphemia"/>
+        <a:font script="Cher" typeface="Plantagenet Cherokee"/>
+        <a:font script="Yiii" typeface="Microsoft Yi Baiti"/>
+        <a:font script="Tibt" typeface="Microsoft Himalaya"/>
+        <a:font script="Thaa" typeface="MV Boli"/>
+        <a:font script="Deva" typeface="Mangal"/>
+        <a:font script="Telu" typeface="Gautami"/>
+        <a:font script="Taml" typeface="Latha"/>
+        <a:font script="Syrc" typeface="Estrangelo Edessa"/>
+        <a:font script="Orya" typeface="Kalinga"/>
+        <a:font script="Mlym" typeface="Kartika"/>
+        <a:font script="Laoo" typeface="DokChampa"/>
+        <a:font script="Sinh" typeface="Iskoola Pota"/>
+        <a:font script="Mong" typeface="Mongolian Baiti"/>
+        <a:font script="Viet" typeface="Times New Roman"/>
+        <a:font script="Uigh" typeface="Microsoft Uighur"/>
+        <a:font script="Geor" typeface="Sylfaen"/>
+        <a:font script="Armn" typeface="Arial"/>
+        <a:font script="Bugi" typeface="Leelawadee UI"/>
+        <a:font script="Bopo" typeface="Microsoft JhengHei"/>
+        <a:font script="Java" typeface="Javanese Text"/>
+        <a:font script="Lisu" typeface="Segoe UI"/>
+        <a:font script="Mymr" typeface="Myanmar Text"/>
+        <a:font script="Nkoo" typeface="Ebrima"/>
+        <a:font script="Olck" typeface="Nirmala UI"/>
+        <a:font script="Osma" typeface="Ebrima"/>
+        <a:font script="Phag" typeface="Phagspa"/>
+        <a:font script="Syrn" typeface="Estrangelo Edessa"/>
+        <a:font script="Syrj" typeface="Estrangelo Edessa"/>
+        <a:font script="Syre" typeface="Estrangelo Edessa"/>
+        <a:font script="Sora" typeface="Nirmala UI"/>
+        <a:font script="Tale" typeface="Microsoft Tai Le"/>
+        <a:font script="Talu" typeface="Microsoft New Tai Lue"/>
+        <a:font script="Tfng" typeface="Ebrima"/>
+      </a:majorFont>
+      <a:minorFont>
+        <a:latin typeface="Calibri" panose="020F0502020204030204"/>
+        <a:ea typeface=""/>
+        <a:cs typeface=""/>
+        <a:font script="Jpan" typeface="游ゴシック"/>
+        <a:font script="Hang" typeface="맑은 고딕"/>
+        <a:font script="Hans" typeface="等线"/>
+        <a:font script="Hant" typeface="新細明體"/>
+        <a:font script="Arab" typeface="Arial"/>
+        <a:font script="Hebr" typeface="Arial"/>
+        <a:font script="Thai" typeface="Cordia New"/>
+        <a:font script="Ethi" typeface="Nyala"/>
+        <a:font script="Beng" typeface="Vrinda"/>
+        <a:font script="Gujr" typeface="Shruti"/>
+        <a:font script="Khmr" typeface="DaunPenh"/>
+        <a:font script="Knda" typeface="Tunga"/>
+        <a:font script="Guru" typeface="Raavi"/>
+        <a:font script="Cans" typeface="Euphemia"/>
+        <a:font script="Cher" typeface="Plantagenet Cherokee"/>
+        <a:font script="Yiii" typeface="Microsoft Yi Baiti"/>
+        <a:font script="Tibt" typeface="Microsoft Himalaya"/>
+        <a:font script="Thaa" typeface="MV Boli"/>
+        <a:font script="Deva" typeface="Mangal"/>
+        <a:font script="Telu" typeface="Gautami"/>
+        <a:font script="Taml" typeface="Latha"/>
+        <a:font script="Syrc" typeface="Estrangelo Edessa"/>
+        <a:font script="Orya" typeface="Kalinga"/>
+        <a:font script="Mlym" typeface="Kartika"/>
+        <a:font script="Laoo" typeface="DokChampa"/>
+        <a:font script="Sinh" typeface="Iskoola Pota"/>
+        <a:font script="Mong" typeface="Mongolian Baiti"/>
+        <a:font script="Viet" typeface="Arial"/>
+        <a:font script="Uigh" typeface="Microsoft Uighur"/>
+        <a:font script="Geor" typeface="Sylfaen"/>
+        <a:font script="Armn" typeface="Arial"/>
+        <a:font script="Bugi" typeface="Leelawadee UI"/>
+        <a:font script="Bopo" typeface="Microsoft JhengHei"/>
+        <a:font script="Java" typeface="Javanese Text"/>
+        <a:font script="Lisu" typeface="Segoe UI"/>
+        <a:font script="Mymr" typeface="Myanmar Text"/>
+        <a:font script="Nkoo" typeface="Ebrima"/>
+        <a:font script="Olck" typeface="Nirmala UI"/>
+        <a:font script="Osma" typeface="Ebrima"/>
+        <a:font script="Phag" typeface="Phagspa"/>
+        <a:font script="Syrn" typeface="Estrangelo Edessa"/>
+        <a:font script="Syrj" typeface="Estrangelo Edessa"/>
+        <a:font script="Syre" typeface="Estrangelo Edessa"/>
+        <a:font script="Sora" typeface="Nirmala UI"/>
+        <a:font script="Tale" typeface="Microsoft Tai Le"/>
+        <a:font script="Talu" typeface="Microsoft New Tai Lue"/>
+        <a:font script="Tfng" typeface="Ebrima"/>
+      </a:minorFont>
+    </a:fontScheme>
+    <a:fmtScheme name="Office">
+      <a:fillStyleLst>
+        <a:solidFill>
+          <a:schemeClr val="phClr"/>
+        </a:solidFill>
+        <a:gradFill rotWithShape="1">
+          <a:gsLst>
+            <a:gs pos="0">
+              <a:schemeClr val="phClr">
+                <a:lumMod val="110000"/>
+                <a:satMod val="105000"/>
+                <a:tint val="67000"/>
+              </a:schemeClr>
+            </a:gs>
+            <a:gs pos="50000">
+              <a:schemeClr val="phClr">
+                <a:lumMod val="105000"/>
+                <a:satMod val="103000"/>
+                <a:tint val="73000"/>
+              </a:schemeClr>
+            </a:gs>
+            <a:gs pos="100000">
+              <a:schemeClr val="phClr">
+                <a:lumMod val="105000"/>
+                <a:satMod val="109000"/>
+                <a:tint val="81000"/>
+              </a:schemeClr>
+            </a:gs>
+          </a:gsLst>
+          <a:lin ang="5400000" scaled="0"/>
+        </a:gradFill>
+        <a:gradFill rotWithShape="1">
+          <a:gsLst>
+            <a:gs pos="0">
+              <a:schemeClr val="phClr">
+                <a:satMod val="103000"/>
+                <a:lumMod val="102000"/>
+                <a:tint val="94000"/>
+              </a:schemeClr>
+            </a:gs>
+            <a:gs pos="50000">
+              <a:schemeClr val="phClr">
+                <a:satMod val="110000"/>
+                <a:lumMod val="100000"/>
+                <a:shade val="100000"/>
+              </a:schemeClr>
+            </a:gs>
+            <a:gs pos="100000">
+              <a:schemeClr val="phClr">
+                <a:lumMod val="99000"/>
+                <a:satMod val="120000"/>
+                <a:shade val="78000"/>
+              </a:schemeClr>
+            </a:gs>
+          </a:gsLst>
+          <a:lin ang="5400000" scaled="0"/>
+        </a:gradFill>
+      </a:fillStyleLst>
+      <a:lnStyleLst>
+        <a:ln w="6350" cap="flat" cmpd="sng" algn="ctr">
+          <a:solidFill>
+            <a:schemeClr val="phClr"/>
+          </a:solidFill>
+          <a:prstDash val="solid"/>
+          <a:miter lim="800000"/>
+        </a:ln>
+        <a:ln w="12700" cap="flat" cmpd="sng" algn="ctr">
+          <a:solidFill>
+            <a:schemeClr val="phClr"/>
+          </a:solidFill>
+          <a:prstDash val="solid"/>
+          <a:miter lim="800000"/>
+        </a:ln>
+        <a:ln w="19050" cap="flat" cmpd="sng" algn="ctr">
+          <a:solidFill>
+            <a:schemeClr val="phClr"/>
+          </a:solidFill>
+          <a:prstDash val="solid"/>
+          <a:miter lim="800000"/>
+        </a:ln>
+      </a:lnStyleLst>
+      <a:effectStyleLst>
+        <a:effectStyle>
+          <a:effectLst/>
+        </a:effectStyle>
+        <a:effectStyle>
+          <a:effectLst/>
+        </a:effectStyle>
+        <a:effectStyle>
+          <a:effectLst>
+            <a:outerShdw blurRad="57150" dist="19050" dir="5400000" algn="ctr" rotWithShape="0">
+              <a:srgbClr val="000000">
+                <a:alpha val="63000"/>
+              </a:srgbClr>
+            </a:outerShdw>
+          </a:effectLst>
+        </a:effectStyle>
+      </a:effectStyleLst>
+      <a:bgFillStyleLst>
+        <a:solidFill>
+          <a:schemeClr val="phClr"/>
+        </a:solidFill>
+        <a:solidFill>
+          <a:schemeClr val="phClr">
+            <a:tint val="95000"/>
+            <a:satMod val="170000"/>
+          </a:schemeClr>
+        </a:solidFill>
+        <a:gradFill rotWithShape="1">
+          <a:gsLst>
+            <a:gs pos="0">
+              <a:schemeClr val="phClr">
+                <a:tint val="93000"/>
+                <a:satMod val="150000"/>
+                <a:shade val="98000"/>
+                <a:lumMod val="102000"/>
+              </a:schemeClr>
+            </a:gs>
+            <a:gs pos="50000">
+              <a:schemeClr val="phClr">
+                <a:tint val="98000"/>
+                <a:satMod val="130000"/>
+                <a:shade val="90000"/>
+                <a:lumMod val="103000"/>
+              </a:schemeClr>
+            </a:gs>
+            <a:gs pos="100000">
+              <a:schemeClr val="phClr">
+                <a:shade val="63000"/>
+                <a:satMod val="120000"/>
+              </a:schemeClr>
+            </a:gs>
+          </a:gsLst>
+          <a:lin ang="5400000" scaled="0"/>
+        </a:gradFill>
+      </a:bgFillStyleLst>
+    </a:fmtScheme>
+  </a:themeElements>
+  <a:objectDefaults/>
+  <a:extraClrSchemeLst/>
+  <a:extLst>
+    <a:ext uri="{05A4C25C-085E-4340-85A3-A5531E510DB2}">
+      <thm15:themeFamily xmlns:thm15="http://schemas.microsoft.com/office/thememl/2012/main" name="Office Theme" id="{62F939B6-93AF-4DB8-9C6B-D6C7DFDC589F}" vid="{4A3C46E8-61CC-4603-A589-7422A47A8E4A}"/>
+    </a:ext>
+  </a:extLst>
+</a:theme>
 </file>